--- a/dist/초2/기술·가정/자립과나눔/초2_기술·가정_자립과나눔_01_시간관리와집안일나누기.pptx
+++ b/dist/초2/기술·가정/자립과나눔/초2_기술·가정_자립과나눔_01_시간관리와집안일나누기.pptx
@@ -114,34 +114,34 @@
   <p:extLst>
     <p:ext uri="{521415D9-36F7-43E2-AB2F-B90AF26B5E84}">
       <p14:sectionLst xmlns:p14="http://schemas.microsoft.com/office/powerpoint/2010/main">
-        <p14:section name="도입" id="{f3ba89b6-2cb1-7b6d-b1a9-daac6565fbb6}">
+        <p14:section name="도입" id="{0ea56a7e-f2f9-6a0a-369f-35ed25985f34}">
           <p14:sldIdLst>
             <p14:sldId id="256"/>
             <p14:sldId id="257"/>
           </p14:sldIdLst>
         </p14:section>
-        <p14:section name="개념" id="{8a5f3815-6645-a98c-6052-2afa57abdbd9}">
+        <p14:section name="개념" id="{464ba112-f869-987b-3ca7-dcbd28a070a8}">
           <p14:sldIdLst>
             <p14:sldId id="258"/>
           </p14:sldIdLst>
         </p14:section>
-        <p14:section name="연습" id="{ac671bd6-0bea-90df-50b7-33ccea319a12}">
+        <p14:section name="연습" id="{f4b84126-5fcc-cced-c6c7-1fbe97d35b58}">
           <p14:sldIdLst>
             <p14:sldId id="259"/>
             <p14:sldId id="260"/>
           </p14:sldIdLst>
         </p14:section>
-        <p14:section name="확인" id="{2381ecd7-e668-a0a5-fd4e-5260258f583e}">
+        <p14:section name="확인" id="{7391f93a-cfad-f0ae-fc5b-158c062eec24}">
           <p14:sldIdLst>
             <p14:sldId id="261"/>
           </p14:sldIdLst>
         </p14:section>
-        <p14:section name="정리" id="{2112b31f-6418-ce3a-4661-4efe2c401a77}">
+        <p14:section name="정리" id="{e0cb8cfe-71d0-1920-1f1c-7dbda4c4bdc9}">
           <p14:sldIdLst>
             <p14:sldId id="262"/>
           </p14:sldIdLst>
         </p14:section>
-        <p14:section name="보충" id="{bcfa96e5-9285-eb35-0a17-b2cc7f5ef3ca}">
+        <p14:section name="보충" id="{ce785ac7-7d0c-41db-9206-33a5f3ffd400}">
           <p14:sldIdLst>
             <p14:sldId id="263"/>
           </p14:sldIdLst>

--- a/dist/초2/기술·가정/자립과나눔/초2_기술·가정_자립과나눔_01_시간관리와집안일나누기.pptx
+++ b/dist/초2/기술·가정/자립과나눔/초2_기술·가정_자립과나눔_01_시간관리와집안일나누기.pptx
@@ -114,34 +114,34 @@
   <p:extLst>
     <p:ext uri="{521415D9-36F7-43E2-AB2F-B90AF26B5E84}">
       <p14:sectionLst xmlns:p14="http://schemas.microsoft.com/office/powerpoint/2010/main">
-        <p14:section name="도입" id="{0ea56a7e-f2f9-6a0a-369f-35ed25985f34}">
+        <p14:section name="도입" id="{55db92d6-a4e9-595d-a851-2d5183f96bf6}">
           <p14:sldIdLst>
             <p14:sldId id="256"/>
             <p14:sldId id="257"/>
           </p14:sldIdLst>
         </p14:section>
-        <p14:section name="개념" id="{464ba112-f869-987b-3ca7-dcbd28a070a8}">
+        <p14:section name="개념" id="{4cef4b31-9514-45b5-48cd-c5b5232e99d3}">
           <p14:sldIdLst>
             <p14:sldId id="258"/>
           </p14:sldIdLst>
         </p14:section>
-        <p14:section name="연습" id="{f4b84126-5fcc-cced-c6c7-1fbe97d35b58}">
+        <p14:section name="연습" id="{3d17c160-89dc-69c1-3fb3-3beb517e3c2c}">
           <p14:sldIdLst>
             <p14:sldId id="259"/>
             <p14:sldId id="260"/>
           </p14:sldIdLst>
         </p14:section>
-        <p14:section name="확인" id="{7391f93a-cfad-f0ae-fc5b-158c062eec24}">
+        <p14:section name="확인" id="{39b3eeb6-a50d-1b0d-211c-841db1692b33}">
           <p14:sldIdLst>
             <p14:sldId id="261"/>
           </p14:sldIdLst>
         </p14:section>
-        <p14:section name="정리" id="{e0cb8cfe-71d0-1920-1f1c-7dbda4c4bdc9}">
+        <p14:section name="정리" id="{39906824-eaf8-dfd6-cecc-9a70537fb405}">
           <p14:sldIdLst>
             <p14:sldId id="262"/>
           </p14:sldIdLst>
         </p14:section>
-        <p14:section name="보충" id="{ce785ac7-7d0c-41db-9206-33a5f3ffd400}">
+        <p14:section name="보충" id="{1470cabf-e256-c40d-8dee-6526e7d737cb}">
           <p14:sldIdLst>
             <p14:sldId id="263"/>
           </p14:sldIdLst>
@@ -659,7 +659,7 @@
 - ② 9시(밤 9시라면 잠자기, 아침 9시라면 학교에서 공부하기 — 아이가 말한 때에 맞으면 맞음)
 막히면
 - 시각을 읽지 못하면 S08(보충)을 먼저 합니다. 일과표는 시각 대신 ‘아침·낮·저녁·밤’으로 적어도 됩니다.
-- 이 차시는 계획상 앞 차시가 없습니다. 초1 ‘내 물건 정리와 집안일’, ‘나의 하루’와 이어지는 내용이며, 시각 읽기는 초2 수학 ‘시각과 시간’에서 자세히 배웁니다.
+- 초1 ‘내 물건 정리와 집안일’, ‘나의 하루’와 이어지는 내용이며, 시각 읽기는 초2 수학 ‘시각과 시간’에서 자세히 배웁니다.
 주의
 - 같은 9시도 아침과 밤이 있다는 것을 알면 일과표에 ‘아침·오후·저녁·밤’을 붙여 쓰는 까닭을 이해합니다.</a:t>
             </a:r>
@@ -1269,7 +1269,7 @@
 막히면
 - 아침·낮·저녁·밤을 종이에 크게 써서 바닥에 놓고, 아이가 하는 일을 말하며 그 위로 옮겨 서게 합니다.
 주의
-- 이 차시는 계획상 앞 차시가 없습니다. 하루의 순서를 말하기 어렵다면 초1 ‘나의 하루’를, 시각 읽기가 어렵다면 초2 수학 ‘시각과 시간’을 먼저 합니다.</a:t>
+- 하루의 순서를 말하기 어렵다면 초1 ‘나의 하루’를, 시각 읽기가 어렵다면 초2 수학 ‘시각과 시간’을 먼저 합니다.</a:t>
             </a:r>
             <a:endParaRPr lang="en-US" dirty="0"/>
           </a:p>
